--- a/ppt/MLOps08-FastAPI.pptx
+++ b/ppt/MLOps08-FastAPI.pptx
@@ -5,10 +5,10 @@
     <p:sldMasterId id="2147483653" r:id="rId1"/>
   </p:sldMasterIdLst>
   <p:notesMasterIdLst>
-    <p:notesMasterId r:id="rId24"/>
+    <p:notesMasterId r:id="rId12"/>
   </p:notesMasterIdLst>
   <p:handoutMasterIdLst>
-    <p:handoutMasterId r:id="rId25"/>
+    <p:handoutMasterId r:id="rId13"/>
   </p:handoutMasterIdLst>
   <p:sldIdLst>
     <p:sldId id="264" r:id="rId2"/>
@@ -21,18 +21,6 @@
     <p:sldId id="272" r:id="rId9"/>
     <p:sldId id="273" r:id="rId10"/>
     <p:sldId id="274" r:id="rId11"/>
-    <p:sldId id="275" r:id="rId12"/>
-    <p:sldId id="276" r:id="rId13"/>
-    <p:sldId id="269" r:id="rId14"/>
-    <p:sldId id="277" r:id="rId15"/>
-    <p:sldId id="278" r:id="rId16"/>
-    <p:sldId id="280" r:id="rId17"/>
-    <p:sldId id="283" r:id="rId18"/>
-    <p:sldId id="281" r:id="rId19"/>
-    <p:sldId id="282" r:id="rId20"/>
-    <p:sldId id="284" r:id="rId21"/>
-    <p:sldId id="285" r:id="rId22"/>
-    <p:sldId id="286" r:id="rId23"/>
   </p:sldIdLst>
   <p:sldSz cx="9144000" cy="6858000" type="screen4x3"/>
   <p:notesSz cx="6648450" cy="9782175"/>
@@ -3883,1290 +3871,6 @@
 </p:sld>
 </file>
 
-<file path=ppt/slides/slide11.xml><?xml version="1.0" encoding="utf-8"?>
-<p:sld xmlns:a="http://schemas.openxmlformats.org/drawingml/2006/main" xmlns:r="http://schemas.openxmlformats.org/officeDocument/2006/relationships" xmlns:p="http://schemas.openxmlformats.org/presentationml/2006/main">
-  <p:cSld>
-    <p:spTree>
-      <p:nvGrpSpPr>
-        <p:cNvPr id="1" name=""/>
-        <p:cNvGrpSpPr/>
-        <p:nvPr/>
-      </p:nvGrpSpPr>
-      <p:grpSpPr>
-        <a:xfrm>
-          <a:off x="0" y="0"/>
-          <a:ext cx="0" cy="0"/>
-          <a:chOff x="0" y="0"/>
-          <a:chExt cx="0" cy="0"/>
-        </a:xfrm>
-      </p:grpSpPr>
-      <p:sp>
-        <p:nvSpPr>
-          <p:cNvPr id="2" name="Titre 1">
-            <a:extLst>
-              <a:ext uri="{FF2B5EF4-FFF2-40B4-BE49-F238E27FC236}">
-                <a16:creationId xmlns:a16="http://schemas.microsoft.com/office/drawing/2014/main" id="{056134E0-3B65-6E5E-176A-56627EEEAE97}"/>
-              </a:ext>
-            </a:extLst>
-          </p:cNvPr>
-          <p:cNvSpPr>
-            <a:spLocks noGrp="1"/>
-          </p:cNvSpPr>
-          <p:nvPr>
-            <p:ph type="title"/>
-          </p:nvPr>
-        </p:nvSpPr>
-        <p:spPr/>
-        <p:txBody>
-          <a:bodyPr/>
-          <a:lstStyle/>
-          <a:p>
-            <a:r>
-              <a:rPr lang="fr-FR" dirty="0" err="1"/>
-              <a:t>Query</a:t>
-            </a:r>
-            <a:r>
-              <a:rPr lang="fr-FR" dirty="0"/>
-              <a:t> </a:t>
-            </a:r>
-            <a:r>
-              <a:rPr lang="fr-FR" dirty="0" err="1"/>
-              <a:t>Parameter</a:t>
-            </a:r>
-            <a:endParaRPr lang="fr-FR" dirty="0"/>
-          </a:p>
-        </p:txBody>
-      </p:sp>
-      <p:sp>
-        <p:nvSpPr>
-          <p:cNvPr id="3" name="Espace réservé du contenu 2">
-            <a:extLst>
-              <a:ext uri="{FF2B5EF4-FFF2-40B4-BE49-F238E27FC236}">
-                <a16:creationId xmlns:a16="http://schemas.microsoft.com/office/drawing/2014/main" id="{53DE2D3C-4C73-CC5C-FCEB-525C4DE0EFA1}"/>
-              </a:ext>
-            </a:extLst>
-          </p:cNvPr>
-          <p:cNvSpPr>
-            <a:spLocks noGrp="1"/>
-          </p:cNvSpPr>
-          <p:nvPr>
-            <p:ph idx="1"/>
-          </p:nvPr>
-        </p:nvSpPr>
-        <p:spPr>
-          <a:xfrm>
-            <a:off x="179512" y="1124744"/>
-            <a:ext cx="8766051" cy="5040560"/>
-          </a:xfrm>
-        </p:spPr>
-        <p:txBody>
-          <a:bodyPr/>
-          <a:lstStyle/>
-          <a:p>
-            <a:r>
-              <a:rPr lang="fr-FR" dirty="0"/>
-              <a:t>Paramètre passer en GET</a:t>
-            </a:r>
-          </a:p>
-          <a:p>
-            <a:pPr lvl="1"/>
-            <a:r>
-              <a:rPr lang="fr-FR" dirty="0"/>
-              <a:t>http://127.0.0.1:8000/items/?skip=0&amp;limit=10</a:t>
-            </a:r>
-          </a:p>
-          <a:p>
-            <a:pPr lvl="1"/>
-            <a:endParaRPr lang="fr-FR" dirty="0"/>
-          </a:p>
-          <a:p>
-            <a:pPr lvl="1"/>
-            <a:endParaRPr lang="fr-FR" dirty="0"/>
-          </a:p>
-          <a:p>
-            <a:pPr lvl="1"/>
-            <a:endParaRPr lang="fr-FR" dirty="0"/>
-          </a:p>
-          <a:p>
-            <a:pPr lvl="1"/>
-            <a:endParaRPr lang="fr-FR" dirty="0"/>
-          </a:p>
-          <a:p>
-            <a:pPr lvl="1"/>
-            <a:endParaRPr lang="fr-FR" dirty="0"/>
-          </a:p>
-          <a:p>
-            <a:pPr lvl="1"/>
-            <a:r>
-              <a:rPr lang="fr-FR" dirty="0"/>
-              <a:t>Dans cet exemple skip et </a:t>
-            </a:r>
-            <a:r>
-              <a:rPr lang="fr-FR" dirty="0" err="1"/>
-              <a:t>limit</a:t>
-            </a:r>
-            <a:r>
-              <a:rPr lang="fr-FR" dirty="0"/>
-              <a:t> sont facultatifs car ils ont des paramètres par défaut</a:t>
-            </a:r>
-          </a:p>
-          <a:p>
-            <a:pPr lvl="1"/>
-            <a:endParaRPr lang="fr-FR" dirty="0"/>
-          </a:p>
-          <a:p>
-            <a:pPr lvl="1"/>
-            <a:endParaRPr lang="fr-FR" dirty="0"/>
-          </a:p>
-          <a:p>
-            <a:pPr marL="457200" lvl="1" indent="0">
-              <a:buNone/>
-            </a:pPr>
-            <a:endParaRPr lang="fr-FR" dirty="0"/>
-          </a:p>
-        </p:txBody>
-      </p:sp>
-      <p:pic>
-        <p:nvPicPr>
-          <p:cNvPr id="5" name="Image 4">
-            <a:extLst>
-              <a:ext uri="{FF2B5EF4-FFF2-40B4-BE49-F238E27FC236}">
-                <a16:creationId xmlns:a16="http://schemas.microsoft.com/office/drawing/2014/main" id="{7ECE8F50-9DD6-2E72-4B3F-5A3D4391F4AB}"/>
-              </a:ext>
-            </a:extLst>
-          </p:cNvPr>
-          <p:cNvPicPr>
-            <a:picLocks noChangeAspect="1"/>
-          </p:cNvPicPr>
-          <p:nvPr/>
-        </p:nvPicPr>
-        <p:blipFill>
-          <a:blip r:embed="rId2"/>
-          <a:stretch>
-            <a:fillRect/>
-          </a:stretch>
-        </p:blipFill>
-        <p:spPr>
-          <a:xfrm>
-            <a:off x="1259632" y="3140968"/>
-            <a:ext cx="6973470" cy="1057704"/>
-          </a:xfrm>
-          <a:prstGeom prst="rect">
-            <a:avLst/>
-          </a:prstGeom>
-        </p:spPr>
-      </p:pic>
-      <p:pic>
-        <p:nvPicPr>
-          <p:cNvPr id="7" name="Image 6">
-            <a:extLst>
-              <a:ext uri="{FF2B5EF4-FFF2-40B4-BE49-F238E27FC236}">
-                <a16:creationId xmlns:a16="http://schemas.microsoft.com/office/drawing/2014/main" id="{13A64531-FCEC-8948-897E-2EE9A01B2050}"/>
-              </a:ext>
-            </a:extLst>
-          </p:cNvPr>
-          <p:cNvPicPr>
-            <a:picLocks noChangeAspect="1"/>
-          </p:cNvPicPr>
-          <p:nvPr/>
-        </p:nvPicPr>
-        <p:blipFill>
-          <a:blip r:embed="rId3"/>
-          <a:stretch>
-            <a:fillRect/>
-          </a:stretch>
-        </p:blipFill>
-        <p:spPr>
-          <a:xfrm>
-            <a:off x="1763688" y="5160994"/>
-            <a:ext cx="5744377" cy="1305107"/>
-          </a:xfrm>
-          <a:prstGeom prst="rect">
-            <a:avLst/>
-          </a:prstGeom>
-        </p:spPr>
-      </p:pic>
-    </p:spTree>
-    <p:extLst>
-      <p:ext uri="{BB962C8B-B14F-4D97-AF65-F5344CB8AC3E}">
-        <p14:creationId xmlns:p14="http://schemas.microsoft.com/office/powerpoint/2010/main" val="3296467705"/>
-      </p:ext>
-    </p:extLst>
-  </p:cSld>
-  <p:clrMapOvr>
-    <a:masterClrMapping/>
-  </p:clrMapOvr>
-</p:sld>
-</file>
-
-<file path=ppt/slides/slide12.xml><?xml version="1.0" encoding="utf-8"?>
-<p:sld xmlns:a="http://schemas.openxmlformats.org/drawingml/2006/main" xmlns:r="http://schemas.openxmlformats.org/officeDocument/2006/relationships" xmlns:p="http://schemas.openxmlformats.org/presentationml/2006/main">
-  <p:cSld>
-    <p:spTree>
-      <p:nvGrpSpPr>
-        <p:cNvPr id="1" name=""/>
-        <p:cNvGrpSpPr/>
-        <p:nvPr/>
-      </p:nvGrpSpPr>
-      <p:grpSpPr>
-        <a:xfrm>
-          <a:off x="0" y="0"/>
-          <a:ext cx="0" cy="0"/>
-          <a:chOff x="0" y="0"/>
-          <a:chExt cx="0" cy="0"/>
-        </a:xfrm>
-      </p:grpSpPr>
-      <p:sp>
-        <p:nvSpPr>
-          <p:cNvPr id="2" name="Titre 1">
-            <a:extLst>
-              <a:ext uri="{FF2B5EF4-FFF2-40B4-BE49-F238E27FC236}">
-                <a16:creationId xmlns:a16="http://schemas.microsoft.com/office/drawing/2014/main" id="{792A61E2-BD0F-E930-A5A2-40E289EF740F}"/>
-              </a:ext>
-            </a:extLst>
-          </p:cNvPr>
-          <p:cNvSpPr>
-            <a:spLocks noGrp="1"/>
-          </p:cNvSpPr>
-          <p:nvPr>
-            <p:ph type="title"/>
-          </p:nvPr>
-        </p:nvSpPr>
-        <p:spPr/>
-        <p:txBody>
-          <a:bodyPr/>
-          <a:lstStyle/>
-          <a:p>
-            <a:r>
-              <a:rPr lang="fr-FR" dirty="0"/>
-              <a:t>Cas complexes</a:t>
-            </a:r>
-          </a:p>
-        </p:txBody>
-      </p:sp>
-      <p:pic>
-        <p:nvPicPr>
-          <p:cNvPr id="5" name="Espace réservé du contenu 4">
-            <a:extLst>
-              <a:ext uri="{FF2B5EF4-FFF2-40B4-BE49-F238E27FC236}">
-                <a16:creationId xmlns:a16="http://schemas.microsoft.com/office/drawing/2014/main" id="{53E4CEEB-31AC-E227-9017-2D00E1404B5B}"/>
-              </a:ext>
-            </a:extLst>
-          </p:cNvPr>
-          <p:cNvPicPr>
-            <a:picLocks noGrp="1" noChangeAspect="1"/>
-          </p:cNvPicPr>
-          <p:nvPr>
-            <p:ph idx="1"/>
-          </p:nvPr>
-        </p:nvPicPr>
-        <p:blipFill>
-          <a:blip r:embed="rId2"/>
-          <a:stretch>
-            <a:fillRect/>
-          </a:stretch>
-        </p:blipFill>
-        <p:spPr>
-          <a:xfrm>
-            <a:off x="461390" y="1937265"/>
-            <a:ext cx="8202170" cy="3991532"/>
-          </a:xfrm>
-        </p:spPr>
-      </p:pic>
-    </p:spTree>
-    <p:extLst>
-      <p:ext uri="{BB962C8B-B14F-4D97-AF65-F5344CB8AC3E}">
-        <p14:creationId xmlns:p14="http://schemas.microsoft.com/office/powerpoint/2010/main" val="1172492775"/>
-      </p:ext>
-    </p:extLst>
-  </p:cSld>
-  <p:clrMapOvr>
-    <a:masterClrMapping/>
-  </p:clrMapOvr>
-</p:sld>
-</file>
-
-<file path=ppt/slides/slide13.xml><?xml version="1.0" encoding="utf-8"?>
-<p:sld xmlns:a="http://schemas.openxmlformats.org/drawingml/2006/main" xmlns:r="http://schemas.openxmlformats.org/officeDocument/2006/relationships" xmlns:p="http://schemas.openxmlformats.org/presentationml/2006/main">
-  <p:cSld>
-    <p:spTree>
-      <p:nvGrpSpPr>
-        <p:cNvPr id="1" name=""/>
-        <p:cNvGrpSpPr/>
-        <p:nvPr/>
-      </p:nvGrpSpPr>
-      <p:grpSpPr>
-        <a:xfrm>
-          <a:off x="0" y="0"/>
-          <a:ext cx="0" cy="0"/>
-          <a:chOff x="0" y="0"/>
-          <a:chExt cx="0" cy="0"/>
-        </a:xfrm>
-      </p:grpSpPr>
-      <p:sp>
-        <p:nvSpPr>
-          <p:cNvPr id="2" name="Titre 1"/>
-          <p:cNvSpPr>
-            <a:spLocks noGrp="1"/>
-          </p:cNvSpPr>
-          <p:nvPr>
-            <p:ph type="title"/>
-          </p:nvPr>
-        </p:nvSpPr>
-        <p:spPr/>
-        <p:txBody>
-          <a:bodyPr/>
-          <a:lstStyle/>
-          <a:p>
-            <a:r>
-              <a:rPr lang="fr-FR" dirty="0"/>
-              <a:t>HTTP</a:t>
-            </a:r>
-          </a:p>
-        </p:txBody>
-      </p:sp>
-      <p:sp>
-        <p:nvSpPr>
-          <p:cNvPr id="3" name="Espace réservé du contenu 2"/>
-          <p:cNvSpPr>
-            <a:spLocks noGrp="1"/>
-          </p:cNvSpPr>
-          <p:nvPr>
-            <p:ph idx="1"/>
-          </p:nvPr>
-        </p:nvSpPr>
-        <p:spPr/>
-        <p:txBody>
-          <a:bodyPr/>
-          <a:lstStyle/>
-          <a:p>
-            <a:r>
-              <a:rPr lang="fr-FR" dirty="0" err="1"/>
-              <a:t>HTTPLib</a:t>
-            </a:r>
-            <a:r>
-              <a:rPr lang="fr-FR" dirty="0"/>
-              <a:t> permet d’effectuer des requêtes HTTP</a:t>
-            </a:r>
-          </a:p>
-          <a:p>
-            <a:r>
-              <a:rPr lang="fr-FR" dirty="0"/>
-              <a:t>Très utile pour « aspirer » des pages</a:t>
-            </a:r>
-          </a:p>
-          <a:p>
-            <a:endParaRPr lang="fr-FR" dirty="0"/>
-          </a:p>
-        </p:txBody>
-      </p:sp>
-      <p:pic>
-        <p:nvPicPr>
-          <p:cNvPr id="4" name="Image 3"/>
-          <p:cNvPicPr>
-            <a:picLocks noChangeAspect="1"/>
-          </p:cNvPicPr>
-          <p:nvPr/>
-        </p:nvPicPr>
-        <p:blipFill>
-          <a:blip r:embed="rId2"/>
-          <a:stretch>
-            <a:fillRect/>
-          </a:stretch>
-        </p:blipFill>
-        <p:spPr>
-          <a:xfrm>
-            <a:off x="1547664" y="2780928"/>
-            <a:ext cx="6340217" cy="1440160"/>
-          </a:xfrm>
-          <a:prstGeom prst="rect">
-            <a:avLst/>
-          </a:prstGeom>
-        </p:spPr>
-      </p:pic>
-    </p:spTree>
-    <p:extLst>
-      <p:ext uri="{BB962C8B-B14F-4D97-AF65-F5344CB8AC3E}">
-        <p14:creationId xmlns:p14="http://schemas.microsoft.com/office/powerpoint/2010/main" val="1361501668"/>
-      </p:ext>
-    </p:extLst>
-  </p:cSld>
-  <p:clrMapOvr>
-    <a:masterClrMapping/>
-  </p:clrMapOvr>
-</p:sld>
-</file>
-
-<file path=ppt/slides/slide14.xml><?xml version="1.0" encoding="utf-8"?>
-<p:sld xmlns:a="http://schemas.openxmlformats.org/drawingml/2006/main" xmlns:r="http://schemas.openxmlformats.org/officeDocument/2006/relationships" xmlns:p="http://schemas.openxmlformats.org/presentationml/2006/main">
-  <p:cSld>
-    <p:spTree>
-      <p:nvGrpSpPr>
-        <p:cNvPr id="1" name=""/>
-        <p:cNvGrpSpPr/>
-        <p:nvPr/>
-      </p:nvGrpSpPr>
-      <p:grpSpPr>
-        <a:xfrm>
-          <a:off x="0" y="0"/>
-          <a:ext cx="0" cy="0"/>
-          <a:chOff x="0" y="0"/>
-          <a:chExt cx="0" cy="0"/>
-        </a:xfrm>
-      </p:grpSpPr>
-      <p:sp>
-        <p:nvSpPr>
-          <p:cNvPr id="2" name="Titre 1">
-            <a:extLst>
-              <a:ext uri="{FF2B5EF4-FFF2-40B4-BE49-F238E27FC236}">
-                <a16:creationId xmlns:a16="http://schemas.microsoft.com/office/drawing/2014/main" id="{B5C2AE5E-3408-9F2A-642B-133829FAF772}"/>
-              </a:ext>
-            </a:extLst>
-          </p:cNvPr>
-          <p:cNvSpPr>
-            <a:spLocks noGrp="1"/>
-          </p:cNvSpPr>
-          <p:nvPr>
-            <p:ph type="title"/>
-          </p:nvPr>
-        </p:nvSpPr>
-        <p:spPr/>
-        <p:txBody>
-          <a:bodyPr/>
-          <a:lstStyle/>
-          <a:p>
-            <a:r>
-              <a:rPr lang="fr-FR" dirty="0"/>
-              <a:t>DTO</a:t>
-            </a:r>
-          </a:p>
-        </p:txBody>
-      </p:sp>
-      <p:sp>
-        <p:nvSpPr>
-          <p:cNvPr id="3" name="Espace réservé du contenu 2">
-            <a:extLst>
-              <a:ext uri="{FF2B5EF4-FFF2-40B4-BE49-F238E27FC236}">
-                <a16:creationId xmlns:a16="http://schemas.microsoft.com/office/drawing/2014/main" id="{27CEB0A7-45A3-5039-58D2-FEECBF73EDC1}"/>
-              </a:ext>
-            </a:extLst>
-          </p:cNvPr>
-          <p:cNvSpPr>
-            <a:spLocks noGrp="1"/>
-          </p:cNvSpPr>
-          <p:nvPr>
-            <p:ph idx="1"/>
-          </p:nvPr>
-        </p:nvSpPr>
-        <p:spPr/>
-        <p:txBody>
-          <a:bodyPr/>
-          <a:lstStyle/>
-          <a:p>
-            <a:r>
-              <a:rPr lang="fr-FR" dirty="0"/>
-              <a:t>Data Transport </a:t>
-            </a:r>
-            <a:r>
-              <a:rPr lang="fr-FR" dirty="0" err="1"/>
-              <a:t>Objects</a:t>
-            </a:r>
-            <a:endParaRPr lang="fr-FR" dirty="0"/>
-          </a:p>
-          <a:p>
-            <a:r>
-              <a:rPr lang="fr-FR" dirty="0"/>
-              <a:t>Objets sérialisés pour les services REST</a:t>
-            </a:r>
-          </a:p>
-          <a:p>
-            <a:r>
-              <a:rPr lang="fr-FR" dirty="0"/>
-              <a:t>Doivent être indépendants des entités</a:t>
-            </a:r>
-          </a:p>
-          <a:p>
-            <a:r>
-              <a:rPr lang="fr-FR" dirty="0"/>
-              <a:t>Doivent hérités de </a:t>
-            </a:r>
-            <a:r>
-              <a:rPr lang="fr-FR" dirty="0" err="1"/>
-              <a:t>pydantic.BaseModel</a:t>
-            </a:r>
-            <a:endParaRPr lang="fr-FR" dirty="0"/>
-          </a:p>
-          <a:p>
-            <a:endParaRPr lang="fr-FR" dirty="0"/>
-          </a:p>
-          <a:p>
-            <a:endParaRPr lang="fr-FR" dirty="0"/>
-          </a:p>
-        </p:txBody>
-      </p:sp>
-      <p:pic>
-        <p:nvPicPr>
-          <p:cNvPr id="5" name="Image 4">
-            <a:extLst>
-              <a:ext uri="{FF2B5EF4-FFF2-40B4-BE49-F238E27FC236}">
-                <a16:creationId xmlns:a16="http://schemas.microsoft.com/office/drawing/2014/main" id="{AC214C1D-5073-4552-6F38-73F1DFE1446D}"/>
-              </a:ext>
-            </a:extLst>
-          </p:cNvPr>
-          <p:cNvPicPr>
-            <a:picLocks noChangeAspect="1"/>
-          </p:cNvPicPr>
-          <p:nvPr/>
-        </p:nvPicPr>
-        <p:blipFill>
-          <a:blip r:embed="rId2"/>
-          <a:stretch>
-            <a:fillRect/>
-          </a:stretch>
-        </p:blipFill>
-        <p:spPr>
-          <a:xfrm>
-            <a:off x="2483768" y="3933056"/>
-            <a:ext cx="3734321" cy="1895740"/>
-          </a:xfrm>
-          <a:prstGeom prst="rect">
-            <a:avLst/>
-          </a:prstGeom>
-        </p:spPr>
-      </p:pic>
-    </p:spTree>
-    <p:extLst>
-      <p:ext uri="{BB962C8B-B14F-4D97-AF65-F5344CB8AC3E}">
-        <p14:creationId xmlns:p14="http://schemas.microsoft.com/office/powerpoint/2010/main" val="1881603286"/>
-      </p:ext>
-    </p:extLst>
-  </p:cSld>
-  <p:clrMapOvr>
-    <a:masterClrMapping/>
-  </p:clrMapOvr>
-</p:sld>
-</file>
-
-<file path=ppt/slides/slide15.xml><?xml version="1.0" encoding="utf-8"?>
-<p:sld xmlns:a="http://schemas.openxmlformats.org/drawingml/2006/main" xmlns:r="http://schemas.openxmlformats.org/officeDocument/2006/relationships" xmlns:p="http://schemas.openxmlformats.org/presentationml/2006/main">
-  <p:cSld>
-    <p:spTree>
-      <p:nvGrpSpPr>
-        <p:cNvPr id="1" name=""/>
-        <p:cNvGrpSpPr/>
-        <p:nvPr/>
-      </p:nvGrpSpPr>
-      <p:grpSpPr>
-        <a:xfrm>
-          <a:off x="0" y="0"/>
-          <a:ext cx="0" cy="0"/>
-          <a:chOff x="0" y="0"/>
-          <a:chExt cx="0" cy="0"/>
-        </a:xfrm>
-      </p:grpSpPr>
-      <p:sp>
-        <p:nvSpPr>
-          <p:cNvPr id="2" name="Titre 1">
-            <a:extLst>
-              <a:ext uri="{FF2B5EF4-FFF2-40B4-BE49-F238E27FC236}">
-                <a16:creationId xmlns:a16="http://schemas.microsoft.com/office/drawing/2014/main" id="{810F47C0-6CAB-C7BE-FBEA-5041FFDCD712}"/>
-              </a:ext>
-            </a:extLst>
-          </p:cNvPr>
-          <p:cNvSpPr>
-            <a:spLocks noGrp="1"/>
-          </p:cNvSpPr>
-          <p:nvPr>
-            <p:ph type="title"/>
-          </p:nvPr>
-        </p:nvSpPr>
-        <p:spPr/>
-        <p:txBody>
-          <a:bodyPr/>
-          <a:lstStyle/>
-          <a:p>
-            <a:r>
-              <a:rPr lang="fr-FR" dirty="0"/>
-              <a:t>Sérialisation DTO</a:t>
-            </a:r>
-          </a:p>
-        </p:txBody>
-      </p:sp>
-      <p:sp>
-        <p:nvSpPr>
-          <p:cNvPr id="3" name="Espace réservé du contenu 2">
-            <a:extLst>
-              <a:ext uri="{FF2B5EF4-FFF2-40B4-BE49-F238E27FC236}">
-                <a16:creationId xmlns:a16="http://schemas.microsoft.com/office/drawing/2014/main" id="{0E7A8296-583F-4FFA-DD96-03EB927468DD}"/>
-              </a:ext>
-            </a:extLst>
-          </p:cNvPr>
-          <p:cNvSpPr>
-            <a:spLocks noGrp="1"/>
-          </p:cNvSpPr>
-          <p:nvPr>
-            <p:ph idx="1"/>
-          </p:nvPr>
-        </p:nvSpPr>
-        <p:spPr/>
-        <p:txBody>
-          <a:bodyPr/>
-          <a:lstStyle/>
-          <a:p>
-            <a:r>
-              <a:rPr lang="fr-FR" dirty="0"/>
-              <a:t>Automatique</a:t>
-            </a:r>
-          </a:p>
-        </p:txBody>
-      </p:sp>
-      <p:pic>
-        <p:nvPicPr>
-          <p:cNvPr id="5" name="Image 4">
-            <a:extLst>
-              <a:ext uri="{FF2B5EF4-FFF2-40B4-BE49-F238E27FC236}">
-                <a16:creationId xmlns:a16="http://schemas.microsoft.com/office/drawing/2014/main" id="{FCA5AC52-600B-3C85-CD65-D31CED9E2984}"/>
-              </a:ext>
-            </a:extLst>
-          </p:cNvPr>
-          <p:cNvPicPr>
-            <a:picLocks noChangeAspect="1"/>
-          </p:cNvPicPr>
-          <p:nvPr/>
-        </p:nvPicPr>
-        <p:blipFill>
-          <a:blip r:embed="rId2"/>
-          <a:stretch>
-            <a:fillRect/>
-          </a:stretch>
-        </p:blipFill>
-        <p:spPr>
-          <a:xfrm>
-            <a:off x="2339752" y="2308817"/>
-            <a:ext cx="4201111" cy="3248478"/>
-          </a:xfrm>
-          <a:prstGeom prst="rect">
-            <a:avLst/>
-          </a:prstGeom>
-        </p:spPr>
-      </p:pic>
-    </p:spTree>
-    <p:extLst>
-      <p:ext uri="{BB962C8B-B14F-4D97-AF65-F5344CB8AC3E}">
-        <p14:creationId xmlns:p14="http://schemas.microsoft.com/office/powerpoint/2010/main" val="982847686"/>
-      </p:ext>
-    </p:extLst>
-  </p:cSld>
-  <p:clrMapOvr>
-    <a:masterClrMapping/>
-  </p:clrMapOvr>
-</p:sld>
-</file>
-
-<file path=ppt/slides/slide16.xml><?xml version="1.0" encoding="utf-8"?>
-<p:sld xmlns:a="http://schemas.openxmlformats.org/drawingml/2006/main" xmlns:r="http://schemas.openxmlformats.org/officeDocument/2006/relationships" xmlns:p="http://schemas.openxmlformats.org/presentationml/2006/main">
-  <p:cSld>
-    <p:spTree>
-      <p:nvGrpSpPr>
-        <p:cNvPr id="1" name=""/>
-        <p:cNvGrpSpPr/>
-        <p:nvPr/>
-      </p:nvGrpSpPr>
-      <p:grpSpPr>
-        <a:xfrm>
-          <a:off x="0" y="0"/>
-          <a:ext cx="0" cy="0"/>
-          <a:chOff x="0" y="0"/>
-          <a:chExt cx="0" cy="0"/>
-        </a:xfrm>
-      </p:grpSpPr>
-      <p:sp>
-        <p:nvSpPr>
-          <p:cNvPr id="2" name="Titre 1">
-            <a:extLst>
-              <a:ext uri="{FF2B5EF4-FFF2-40B4-BE49-F238E27FC236}">
-                <a16:creationId xmlns:a16="http://schemas.microsoft.com/office/drawing/2014/main" id="{AE3EBF99-B7E0-A1A4-5DC3-D12538AE32D6}"/>
-              </a:ext>
-            </a:extLst>
-          </p:cNvPr>
-          <p:cNvSpPr>
-            <a:spLocks noGrp="1"/>
-          </p:cNvSpPr>
-          <p:nvPr>
-            <p:ph type="title"/>
-          </p:nvPr>
-        </p:nvSpPr>
-        <p:spPr/>
-        <p:txBody>
-          <a:bodyPr/>
-          <a:lstStyle/>
-          <a:p>
-            <a:r>
-              <a:rPr lang="fr-FR" dirty="0"/>
-              <a:t>CRUD</a:t>
-            </a:r>
-          </a:p>
-        </p:txBody>
-      </p:sp>
-      <p:sp>
-        <p:nvSpPr>
-          <p:cNvPr id="3" name="Espace réservé du contenu 2">
-            <a:extLst>
-              <a:ext uri="{FF2B5EF4-FFF2-40B4-BE49-F238E27FC236}">
-                <a16:creationId xmlns:a16="http://schemas.microsoft.com/office/drawing/2014/main" id="{11DA4ED9-D7C4-35ED-64B7-5CD6C3B85E00}"/>
-              </a:ext>
-            </a:extLst>
-          </p:cNvPr>
-          <p:cNvSpPr>
-            <a:spLocks noGrp="1"/>
-          </p:cNvSpPr>
-          <p:nvPr>
-            <p:ph idx="1"/>
-          </p:nvPr>
-        </p:nvSpPr>
-        <p:spPr/>
-        <p:txBody>
-          <a:bodyPr/>
-          <a:lstStyle/>
-          <a:p>
-            <a:r>
-              <a:rPr lang="fr-FR" dirty="0"/>
-              <a:t>POST</a:t>
-            </a:r>
-          </a:p>
-          <a:p>
-            <a:pPr lvl="1"/>
-            <a:r>
-              <a:rPr lang="fr-FR" dirty="0"/>
-              <a:t>Utilisé pour effectuer un </a:t>
-            </a:r>
-            <a:r>
-              <a:rPr lang="fr-FR" dirty="0" err="1"/>
-              <a:t>Create</a:t>
-            </a:r>
-            <a:endParaRPr lang="fr-FR" dirty="0"/>
-          </a:p>
-          <a:p>
-            <a:r>
-              <a:rPr lang="fr-FR" dirty="0"/>
-              <a:t>PUT</a:t>
-            </a:r>
-          </a:p>
-          <a:p>
-            <a:pPr lvl="1"/>
-            <a:r>
-              <a:rPr lang="fr-FR" dirty="0"/>
-              <a:t>Utilisé pour effectuer un Update</a:t>
-            </a:r>
-          </a:p>
-          <a:p>
-            <a:r>
-              <a:rPr lang="fr-FR" dirty="0"/>
-              <a:t>DELETE</a:t>
-            </a:r>
-          </a:p>
-          <a:p>
-            <a:pPr lvl="1"/>
-            <a:r>
-              <a:rPr lang="fr-FR" dirty="0"/>
-              <a:t>Utilisé pour effectuer un </a:t>
-            </a:r>
-            <a:r>
-              <a:rPr lang="fr-FR" dirty="0" err="1"/>
-              <a:t>Delete</a:t>
-            </a:r>
-            <a:endParaRPr lang="fr-FR" dirty="0"/>
-          </a:p>
-          <a:p>
-            <a:r>
-              <a:rPr lang="fr-FR" dirty="0"/>
-              <a:t>GET</a:t>
-            </a:r>
-          </a:p>
-          <a:p>
-            <a:pPr lvl="1"/>
-            <a:r>
-              <a:rPr lang="fr-FR" dirty="0"/>
-              <a:t>Utilisé pour effectuer un </a:t>
-            </a:r>
-            <a:r>
-              <a:rPr lang="fr-FR" dirty="0" err="1"/>
-              <a:t>Request</a:t>
-            </a:r>
-            <a:endParaRPr lang="fr-FR" dirty="0"/>
-          </a:p>
-          <a:p>
-            <a:pPr lvl="1"/>
-            <a:r>
-              <a:rPr lang="fr-FR" dirty="0"/>
-              <a:t>POST est utilisé lors d’un </a:t>
-            </a:r>
-            <a:r>
-              <a:rPr lang="fr-FR" dirty="0" err="1"/>
-              <a:t>request</a:t>
-            </a:r>
-            <a:r>
-              <a:rPr lang="fr-FR" dirty="0"/>
-              <a:t> sur un DTO</a:t>
-            </a:r>
-          </a:p>
-        </p:txBody>
-      </p:sp>
-      <p:pic>
-        <p:nvPicPr>
-          <p:cNvPr id="5" name="Image 4">
-            <a:extLst>
-              <a:ext uri="{FF2B5EF4-FFF2-40B4-BE49-F238E27FC236}">
-                <a16:creationId xmlns:a16="http://schemas.microsoft.com/office/drawing/2014/main" id="{4FEBB502-5E47-762E-7ACF-F2CE3C322578}"/>
-              </a:ext>
-            </a:extLst>
-          </p:cNvPr>
-          <p:cNvPicPr>
-            <a:picLocks noChangeAspect="1"/>
-          </p:cNvPicPr>
-          <p:nvPr/>
-        </p:nvPicPr>
-        <p:blipFill>
-          <a:blip r:embed="rId2"/>
-          <a:stretch>
-            <a:fillRect/>
-          </a:stretch>
-        </p:blipFill>
-        <p:spPr>
-          <a:xfrm>
-            <a:off x="2195736" y="5651584"/>
-            <a:ext cx="3620005" cy="828791"/>
-          </a:xfrm>
-          <a:prstGeom prst="rect">
-            <a:avLst/>
-          </a:prstGeom>
-        </p:spPr>
-      </p:pic>
-    </p:spTree>
-    <p:extLst>
-      <p:ext uri="{BB962C8B-B14F-4D97-AF65-F5344CB8AC3E}">
-        <p14:creationId xmlns:p14="http://schemas.microsoft.com/office/powerpoint/2010/main" val="132524635"/>
-      </p:ext>
-    </p:extLst>
-  </p:cSld>
-  <p:clrMapOvr>
-    <a:masterClrMapping/>
-  </p:clrMapOvr>
-</p:sld>
-</file>
-
-<file path=ppt/slides/slide17.xml><?xml version="1.0" encoding="utf-8"?>
-<p:sld xmlns:a="http://schemas.openxmlformats.org/drawingml/2006/main" xmlns:r="http://schemas.openxmlformats.org/officeDocument/2006/relationships" xmlns:p="http://schemas.openxmlformats.org/presentationml/2006/main">
-  <p:cSld>
-    <p:spTree>
-      <p:nvGrpSpPr>
-        <p:cNvPr id="1" name=""/>
-        <p:cNvGrpSpPr/>
-        <p:nvPr/>
-      </p:nvGrpSpPr>
-      <p:grpSpPr>
-        <a:xfrm>
-          <a:off x="0" y="0"/>
-          <a:ext cx="0" cy="0"/>
-          <a:chOff x="0" y="0"/>
-          <a:chExt cx="0" cy="0"/>
-        </a:xfrm>
-      </p:grpSpPr>
-      <p:sp>
-        <p:nvSpPr>
-          <p:cNvPr id="2" name="Titre 1">
-            <a:extLst>
-              <a:ext uri="{FF2B5EF4-FFF2-40B4-BE49-F238E27FC236}">
-                <a16:creationId xmlns:a16="http://schemas.microsoft.com/office/drawing/2014/main" id="{CFCF1ECC-33A5-6B78-C775-BD3C7A353CE7}"/>
-              </a:ext>
-            </a:extLst>
-          </p:cNvPr>
-          <p:cNvSpPr>
-            <a:spLocks noGrp="1"/>
-          </p:cNvSpPr>
-          <p:nvPr>
-            <p:ph type="title"/>
-          </p:nvPr>
-        </p:nvSpPr>
-        <p:spPr/>
-        <p:txBody>
-          <a:bodyPr/>
-          <a:lstStyle/>
-          <a:p>
-            <a:r>
-              <a:rPr lang="fr-FR" dirty="0"/>
-              <a:t>Retours typés</a:t>
-            </a:r>
-          </a:p>
-        </p:txBody>
-      </p:sp>
-      <p:sp>
-        <p:nvSpPr>
-          <p:cNvPr id="3" name="Espace réservé du contenu 2">
-            <a:extLst>
-              <a:ext uri="{FF2B5EF4-FFF2-40B4-BE49-F238E27FC236}">
-                <a16:creationId xmlns:a16="http://schemas.microsoft.com/office/drawing/2014/main" id="{D29817D1-EDD5-1F54-510C-37641D50A011}"/>
-              </a:ext>
-            </a:extLst>
-          </p:cNvPr>
-          <p:cNvSpPr>
-            <a:spLocks noGrp="1"/>
-          </p:cNvSpPr>
-          <p:nvPr>
-            <p:ph idx="1"/>
-          </p:nvPr>
-        </p:nvSpPr>
-        <p:spPr/>
-        <p:txBody>
-          <a:bodyPr/>
-          <a:lstStyle/>
-          <a:p>
-            <a:r>
-              <a:rPr lang="fr-FR" dirty="0"/>
-              <a:t>Il est conseillé de typer les retours de fonction</a:t>
-            </a:r>
-          </a:p>
-        </p:txBody>
-      </p:sp>
-      <p:pic>
-        <p:nvPicPr>
-          <p:cNvPr id="5" name="Image 4">
-            <a:extLst>
-              <a:ext uri="{FF2B5EF4-FFF2-40B4-BE49-F238E27FC236}">
-                <a16:creationId xmlns:a16="http://schemas.microsoft.com/office/drawing/2014/main" id="{AC830DA6-66BA-01F5-33CB-3EF6E011A8B8}"/>
-              </a:ext>
-            </a:extLst>
-          </p:cNvPr>
-          <p:cNvPicPr>
-            <a:picLocks noChangeAspect="1"/>
-          </p:cNvPicPr>
-          <p:nvPr/>
-        </p:nvPicPr>
-        <p:blipFill>
-          <a:blip r:embed="rId2"/>
-          <a:stretch>
-            <a:fillRect/>
-          </a:stretch>
-        </p:blipFill>
-        <p:spPr>
-          <a:xfrm>
-            <a:off x="1909391" y="2081024"/>
-            <a:ext cx="5325218" cy="2695951"/>
-          </a:xfrm>
-          <a:prstGeom prst="rect">
-            <a:avLst/>
-          </a:prstGeom>
-        </p:spPr>
-      </p:pic>
-    </p:spTree>
-    <p:extLst>
-      <p:ext uri="{BB962C8B-B14F-4D97-AF65-F5344CB8AC3E}">
-        <p14:creationId xmlns:p14="http://schemas.microsoft.com/office/powerpoint/2010/main" val="1649469206"/>
-      </p:ext>
-    </p:extLst>
-  </p:cSld>
-  <p:clrMapOvr>
-    <a:masterClrMapping/>
-  </p:clrMapOvr>
-</p:sld>
-</file>
-
-<file path=ppt/slides/slide18.xml><?xml version="1.0" encoding="utf-8"?>
-<p:sld xmlns:a="http://schemas.openxmlformats.org/drawingml/2006/main" xmlns:r="http://schemas.openxmlformats.org/officeDocument/2006/relationships" xmlns:p="http://schemas.openxmlformats.org/presentationml/2006/main">
-  <p:cSld>
-    <p:spTree>
-      <p:nvGrpSpPr>
-        <p:cNvPr id="1" name=""/>
-        <p:cNvGrpSpPr/>
-        <p:nvPr/>
-      </p:nvGrpSpPr>
-      <p:grpSpPr>
-        <a:xfrm>
-          <a:off x="0" y="0"/>
-          <a:ext cx="0" cy="0"/>
-          <a:chOff x="0" y="0"/>
-          <a:chExt cx="0" cy="0"/>
-        </a:xfrm>
-      </p:grpSpPr>
-      <p:sp>
-        <p:nvSpPr>
-          <p:cNvPr id="2" name="Titre 1">
-            <a:extLst>
-              <a:ext uri="{FF2B5EF4-FFF2-40B4-BE49-F238E27FC236}">
-                <a16:creationId xmlns:a16="http://schemas.microsoft.com/office/drawing/2014/main" id="{85638CCB-BFD0-6749-910A-BD0FE90D2014}"/>
-              </a:ext>
-            </a:extLst>
-          </p:cNvPr>
-          <p:cNvSpPr>
-            <a:spLocks noGrp="1"/>
-          </p:cNvSpPr>
-          <p:nvPr>
-            <p:ph type="title"/>
-          </p:nvPr>
-        </p:nvSpPr>
-        <p:spPr/>
-        <p:txBody>
-          <a:bodyPr/>
-          <a:lstStyle/>
-          <a:p>
-            <a:r>
-              <a:rPr lang="fr-FR" dirty="0"/>
-              <a:t>Paramètres Body</a:t>
-            </a:r>
-          </a:p>
-        </p:txBody>
-      </p:sp>
-      <p:sp>
-        <p:nvSpPr>
-          <p:cNvPr id="3" name="Espace réservé du contenu 2">
-            <a:extLst>
-              <a:ext uri="{FF2B5EF4-FFF2-40B4-BE49-F238E27FC236}">
-                <a16:creationId xmlns:a16="http://schemas.microsoft.com/office/drawing/2014/main" id="{41AB0A0D-32DC-4D4C-BAF9-4DE3AE03A985}"/>
-              </a:ext>
-            </a:extLst>
-          </p:cNvPr>
-          <p:cNvSpPr>
-            <a:spLocks noGrp="1"/>
-          </p:cNvSpPr>
-          <p:nvPr>
-            <p:ph idx="1"/>
-          </p:nvPr>
-        </p:nvSpPr>
-        <p:spPr/>
-        <p:txBody>
-          <a:bodyPr/>
-          <a:lstStyle/>
-          <a:p>
-            <a:r>
-              <a:rPr lang="fr-FR" dirty="0"/>
-              <a:t>Il est possible d’utiliser un paramètre BODY POST sans passer par </a:t>
-            </a:r>
-            <a:r>
-              <a:rPr lang="fr-FR" dirty="0" err="1"/>
-              <a:t>pydantic</a:t>
-            </a:r>
-            <a:endParaRPr lang="fr-FR" dirty="0"/>
-          </a:p>
-          <a:p>
-            <a:r>
-              <a:rPr lang="fr-FR" dirty="0"/>
-              <a:t>Il suffit de créer un paramètre de type</a:t>
-            </a:r>
-          </a:p>
-          <a:p>
-            <a:pPr lvl="1"/>
-            <a:r>
-              <a:rPr lang="fr-FR" dirty="0" err="1"/>
-              <a:t>Annotated</a:t>
-            </a:r>
-            <a:r>
-              <a:rPr lang="fr-FR" dirty="0"/>
-              <a:t>[</a:t>
-            </a:r>
-            <a:r>
-              <a:rPr lang="fr-FR" dirty="0" err="1"/>
-              <a:t>int</a:t>
-            </a:r>
-            <a:r>
-              <a:rPr lang="fr-FR" dirty="0"/>
-              <a:t>, Body()]</a:t>
-            </a:r>
-          </a:p>
-          <a:p>
-            <a:endParaRPr lang="fr-FR" dirty="0"/>
-          </a:p>
-          <a:p>
-            <a:endParaRPr lang="fr-FR" dirty="0"/>
-          </a:p>
-        </p:txBody>
-      </p:sp>
-    </p:spTree>
-    <p:extLst>
-      <p:ext uri="{BB962C8B-B14F-4D97-AF65-F5344CB8AC3E}">
-        <p14:creationId xmlns:p14="http://schemas.microsoft.com/office/powerpoint/2010/main" val="79992408"/>
-      </p:ext>
-    </p:extLst>
-  </p:cSld>
-  <p:clrMapOvr>
-    <a:masterClrMapping/>
-  </p:clrMapOvr>
-</p:sld>
-</file>
-
-<file path=ppt/slides/slide19.xml><?xml version="1.0" encoding="utf-8"?>
-<p:sld xmlns:a="http://schemas.openxmlformats.org/drawingml/2006/main" xmlns:r="http://schemas.openxmlformats.org/officeDocument/2006/relationships" xmlns:p="http://schemas.openxmlformats.org/presentationml/2006/main">
-  <p:cSld>
-    <p:spTree>
-      <p:nvGrpSpPr>
-        <p:cNvPr id="1" name=""/>
-        <p:cNvGrpSpPr/>
-        <p:nvPr/>
-      </p:nvGrpSpPr>
-      <p:grpSpPr>
-        <a:xfrm>
-          <a:off x="0" y="0"/>
-          <a:ext cx="0" cy="0"/>
-          <a:chOff x="0" y="0"/>
-          <a:chExt cx="0" cy="0"/>
-        </a:xfrm>
-      </p:grpSpPr>
-      <p:sp>
-        <p:nvSpPr>
-          <p:cNvPr id="2" name="Titre 1">
-            <a:extLst>
-              <a:ext uri="{FF2B5EF4-FFF2-40B4-BE49-F238E27FC236}">
-                <a16:creationId xmlns:a16="http://schemas.microsoft.com/office/drawing/2014/main" id="{85638CCB-BFD0-6749-910A-BD0FE90D2014}"/>
-              </a:ext>
-            </a:extLst>
-          </p:cNvPr>
-          <p:cNvSpPr>
-            <a:spLocks noGrp="1"/>
-          </p:cNvSpPr>
-          <p:nvPr>
-            <p:ph type="title"/>
-          </p:nvPr>
-        </p:nvSpPr>
-        <p:spPr/>
-        <p:txBody>
-          <a:bodyPr/>
-          <a:lstStyle/>
-          <a:p>
-            <a:r>
-              <a:rPr lang="fr-FR" dirty="0"/>
-              <a:t>Cas complexe</a:t>
-            </a:r>
-          </a:p>
-        </p:txBody>
-      </p:sp>
-      <p:sp>
-        <p:nvSpPr>
-          <p:cNvPr id="3" name="Espace réservé du contenu 2">
-            <a:extLst>
-              <a:ext uri="{FF2B5EF4-FFF2-40B4-BE49-F238E27FC236}">
-                <a16:creationId xmlns:a16="http://schemas.microsoft.com/office/drawing/2014/main" id="{41AB0A0D-32DC-4D4C-BAF9-4DE3AE03A985}"/>
-              </a:ext>
-            </a:extLst>
-          </p:cNvPr>
-          <p:cNvSpPr>
-            <a:spLocks noGrp="1"/>
-          </p:cNvSpPr>
-          <p:nvPr>
-            <p:ph idx="1"/>
-          </p:nvPr>
-        </p:nvSpPr>
-        <p:spPr/>
-        <p:txBody>
-          <a:bodyPr/>
-          <a:lstStyle/>
-          <a:p>
-            <a:r>
-              <a:rPr lang="fr-FR" dirty="0"/>
-              <a:t>Dans ce cas complexe</a:t>
-            </a:r>
-          </a:p>
-          <a:p>
-            <a:pPr lvl="1"/>
-            <a:r>
-              <a:rPr lang="fr-FR" dirty="0"/>
-              <a:t>Avec DTO + Paramètres + Body</a:t>
-            </a:r>
-          </a:p>
-          <a:p>
-            <a:endParaRPr lang="fr-FR" dirty="0"/>
-          </a:p>
-          <a:p>
-            <a:endParaRPr lang="fr-FR" dirty="0"/>
-          </a:p>
-          <a:p>
-            <a:endParaRPr lang="fr-FR" dirty="0"/>
-          </a:p>
-          <a:p>
-            <a:r>
-              <a:rPr lang="fr-FR" dirty="0"/>
-              <a:t>Nous attendons</a:t>
-            </a:r>
-          </a:p>
-          <a:p>
-            <a:endParaRPr lang="fr-FR" dirty="0"/>
-          </a:p>
-          <a:p>
-            <a:endParaRPr lang="fr-FR" dirty="0"/>
-          </a:p>
-        </p:txBody>
-      </p:sp>
-      <p:pic>
-        <p:nvPicPr>
-          <p:cNvPr id="5" name="Image 4">
-            <a:extLst>
-              <a:ext uri="{FF2B5EF4-FFF2-40B4-BE49-F238E27FC236}">
-                <a16:creationId xmlns:a16="http://schemas.microsoft.com/office/drawing/2014/main" id="{373ACDDB-B133-F445-5A82-E81420FDCFFD}"/>
-              </a:ext>
-            </a:extLst>
-          </p:cNvPr>
-          <p:cNvPicPr>
-            <a:picLocks noChangeAspect="1"/>
-          </p:cNvPicPr>
-          <p:nvPr/>
-        </p:nvPicPr>
-        <p:blipFill>
-          <a:blip r:embed="rId2"/>
-          <a:stretch>
-            <a:fillRect/>
-          </a:stretch>
-        </p:blipFill>
-        <p:spPr>
-          <a:xfrm>
-            <a:off x="523373" y="2373733"/>
-            <a:ext cx="8078327" cy="1419423"/>
-          </a:xfrm>
-          <a:prstGeom prst="rect">
-            <a:avLst/>
-          </a:prstGeom>
-        </p:spPr>
-      </p:pic>
-      <p:pic>
-        <p:nvPicPr>
-          <p:cNvPr id="7" name="Image 6">
-            <a:extLst>
-              <a:ext uri="{FF2B5EF4-FFF2-40B4-BE49-F238E27FC236}">
-                <a16:creationId xmlns:a16="http://schemas.microsoft.com/office/drawing/2014/main" id="{3D68B818-3439-7F58-0430-0DAE20CEDDF3}"/>
-              </a:ext>
-            </a:extLst>
-          </p:cNvPr>
-          <p:cNvPicPr>
-            <a:picLocks noChangeAspect="1"/>
-          </p:cNvPicPr>
-          <p:nvPr/>
-        </p:nvPicPr>
-        <p:blipFill>
-          <a:blip r:embed="rId3"/>
-          <a:stretch>
-            <a:fillRect/>
-          </a:stretch>
-        </p:blipFill>
-        <p:spPr>
-          <a:xfrm>
-            <a:off x="3923928" y="3798530"/>
-            <a:ext cx="4201111" cy="3105583"/>
-          </a:xfrm>
-          <a:prstGeom prst="rect">
-            <a:avLst/>
-          </a:prstGeom>
-        </p:spPr>
-      </p:pic>
-    </p:spTree>
-    <p:extLst>
-      <p:ext uri="{BB962C8B-B14F-4D97-AF65-F5344CB8AC3E}">
-        <p14:creationId xmlns:p14="http://schemas.microsoft.com/office/powerpoint/2010/main" val="896841252"/>
-      </p:ext>
-    </p:extLst>
-  </p:cSld>
-  <p:clrMapOvr>
-    <a:masterClrMapping/>
-  </p:clrMapOvr>
-</p:sld>
-</file>
-
 <file path=ppt/slides/slide2.xml><?xml version="1.0" encoding="utf-8"?>
 <p:sld xmlns:a="http://schemas.openxmlformats.org/drawingml/2006/main" xmlns:r="http://schemas.openxmlformats.org/officeDocument/2006/relationships" xmlns:p="http://schemas.openxmlformats.org/presentationml/2006/main">
   <p:cSld>
@@ -5272,468 +3976,6 @@
     <p:extLst>
       <p:ext uri="{BB962C8B-B14F-4D97-AF65-F5344CB8AC3E}">
         <p14:creationId xmlns:p14="http://schemas.microsoft.com/office/powerpoint/2010/main" val="2850296621"/>
-      </p:ext>
-    </p:extLst>
-  </p:cSld>
-  <p:clrMapOvr>
-    <a:masterClrMapping/>
-  </p:clrMapOvr>
-</p:sld>
-</file>
-
-<file path=ppt/slides/slide20.xml><?xml version="1.0" encoding="utf-8"?>
-<p:sld xmlns:a="http://schemas.openxmlformats.org/drawingml/2006/main" xmlns:r="http://schemas.openxmlformats.org/officeDocument/2006/relationships" xmlns:p="http://schemas.openxmlformats.org/presentationml/2006/main">
-  <p:cSld>
-    <p:spTree>
-      <p:nvGrpSpPr>
-        <p:cNvPr id="1" name=""/>
-        <p:cNvGrpSpPr/>
-        <p:nvPr/>
-      </p:nvGrpSpPr>
-      <p:grpSpPr>
-        <a:xfrm>
-          <a:off x="0" y="0"/>
-          <a:ext cx="0" cy="0"/>
-          <a:chOff x="0" y="0"/>
-          <a:chExt cx="0" cy="0"/>
-        </a:xfrm>
-      </p:grpSpPr>
-      <p:sp>
-        <p:nvSpPr>
-          <p:cNvPr id="2" name="Titre 1">
-            <a:extLst>
-              <a:ext uri="{FF2B5EF4-FFF2-40B4-BE49-F238E27FC236}">
-                <a16:creationId xmlns:a16="http://schemas.microsoft.com/office/drawing/2014/main" id="{78BA1321-F63D-2F46-4E73-F209D4993333}"/>
-              </a:ext>
-            </a:extLst>
-          </p:cNvPr>
-          <p:cNvSpPr>
-            <a:spLocks noGrp="1"/>
-          </p:cNvSpPr>
-          <p:nvPr>
-            <p:ph type="title"/>
-          </p:nvPr>
-        </p:nvSpPr>
-        <p:spPr/>
-        <p:txBody>
-          <a:bodyPr/>
-          <a:lstStyle/>
-          <a:p>
-            <a:r>
-              <a:rPr lang="fr-FR" dirty="0" err="1"/>
-              <a:t>Status</a:t>
-            </a:r>
-            <a:r>
-              <a:rPr lang="fr-FR" dirty="0"/>
-              <a:t> code</a:t>
-            </a:r>
-          </a:p>
-        </p:txBody>
-      </p:sp>
-      <p:sp>
-        <p:nvSpPr>
-          <p:cNvPr id="3" name="Espace réservé du contenu 2">
-            <a:extLst>
-              <a:ext uri="{FF2B5EF4-FFF2-40B4-BE49-F238E27FC236}">
-                <a16:creationId xmlns:a16="http://schemas.microsoft.com/office/drawing/2014/main" id="{86D8EBFB-0029-7CEC-4F19-A3F881D8393C}"/>
-              </a:ext>
-            </a:extLst>
-          </p:cNvPr>
-          <p:cNvSpPr>
-            <a:spLocks noGrp="1"/>
-          </p:cNvSpPr>
-          <p:nvPr>
-            <p:ph idx="1"/>
-          </p:nvPr>
-        </p:nvSpPr>
-        <p:spPr/>
-        <p:txBody>
-          <a:bodyPr/>
-          <a:lstStyle/>
-          <a:p>
-            <a:r>
-              <a:rPr lang="fr-FR" dirty="0"/>
-              <a:t>Bonne pratique</a:t>
-            </a:r>
-          </a:p>
-          <a:p>
-            <a:r>
-              <a:rPr lang="fr-FR" dirty="0"/>
-              <a:t>200 = ok</a:t>
-            </a:r>
-          </a:p>
-          <a:p>
-            <a:pPr lvl="1"/>
-            <a:r>
-              <a:rPr lang="fr-FR" dirty="0"/>
-              <a:t>201 = </a:t>
-            </a:r>
-            <a:r>
-              <a:rPr lang="fr-FR" dirty="0" err="1"/>
-              <a:t>created</a:t>
-            </a:r>
-            <a:endParaRPr lang="fr-FR" dirty="0"/>
-          </a:p>
-          <a:p>
-            <a:pPr lvl="1"/>
-            <a:r>
-              <a:rPr lang="fr-FR" dirty="0"/>
-              <a:t>202 = </a:t>
-            </a:r>
-            <a:r>
-              <a:rPr lang="fr-FR" dirty="0" err="1"/>
-              <a:t>updated</a:t>
-            </a:r>
-            <a:endParaRPr lang="fr-FR" dirty="0"/>
-          </a:p>
-          <a:p>
-            <a:pPr lvl="1"/>
-            <a:r>
-              <a:rPr lang="fr-FR" dirty="0"/>
-              <a:t>204 = no content</a:t>
-            </a:r>
-          </a:p>
-          <a:p>
-            <a:r>
-              <a:rPr lang="fr-FR" dirty="0"/>
-              <a:t>300 = redirection</a:t>
-            </a:r>
-          </a:p>
-          <a:p>
-            <a:r>
-              <a:rPr lang="fr-FR" dirty="0"/>
-              <a:t>400 = erreurs</a:t>
-            </a:r>
-          </a:p>
-          <a:p>
-            <a:pPr lvl="1"/>
-            <a:r>
-              <a:rPr lang="fr-FR" dirty="0"/>
-              <a:t>404 = Not </a:t>
-            </a:r>
-            <a:r>
-              <a:rPr lang="fr-FR" dirty="0" err="1"/>
-              <a:t>found</a:t>
-            </a:r>
-            <a:endParaRPr lang="fr-FR" dirty="0"/>
-          </a:p>
-          <a:p>
-            <a:r>
-              <a:rPr lang="fr-FR" dirty="0"/>
-              <a:t>500 = </a:t>
-            </a:r>
-            <a:r>
-              <a:rPr lang="fr-FR" dirty="0" err="1"/>
-              <a:t>Internal</a:t>
-            </a:r>
-            <a:r>
-              <a:rPr lang="fr-FR" dirty="0"/>
-              <a:t> server </a:t>
-            </a:r>
-            <a:r>
-              <a:rPr lang="fr-FR" dirty="0" err="1"/>
-              <a:t>error</a:t>
-            </a:r>
-            <a:endParaRPr lang="fr-FR" dirty="0"/>
-          </a:p>
-          <a:p>
-            <a:r>
-              <a:rPr lang="fr-FR" dirty="0"/>
-              <a:t>Préférer les </a:t>
-            </a:r>
-            <a:r>
-              <a:rPr lang="fr-FR" dirty="0" err="1"/>
-              <a:t>enums</a:t>
-            </a:r>
-            <a:r>
-              <a:rPr lang="fr-FR" dirty="0"/>
-              <a:t> </a:t>
-            </a:r>
-          </a:p>
-          <a:p>
-            <a:endParaRPr lang="fr-FR" dirty="0"/>
-          </a:p>
-        </p:txBody>
-      </p:sp>
-      <p:pic>
-        <p:nvPicPr>
-          <p:cNvPr id="5" name="Image 4">
-            <a:extLst>
-              <a:ext uri="{FF2B5EF4-FFF2-40B4-BE49-F238E27FC236}">
-                <a16:creationId xmlns:a16="http://schemas.microsoft.com/office/drawing/2014/main" id="{7D207745-1C2F-315E-07A6-D37AA625E3E9}"/>
-              </a:ext>
-            </a:extLst>
-          </p:cNvPr>
-          <p:cNvPicPr>
-            <a:picLocks noChangeAspect="1"/>
-          </p:cNvPicPr>
-          <p:nvPr/>
-        </p:nvPicPr>
-        <p:blipFill>
-          <a:blip r:embed="rId2"/>
-          <a:stretch>
-            <a:fillRect/>
-          </a:stretch>
-        </p:blipFill>
-        <p:spPr>
-          <a:xfrm>
-            <a:off x="3635896" y="1412776"/>
-            <a:ext cx="4010585" cy="971686"/>
-          </a:xfrm>
-          <a:prstGeom prst="rect">
-            <a:avLst/>
-          </a:prstGeom>
-        </p:spPr>
-      </p:pic>
-      <p:pic>
-        <p:nvPicPr>
-          <p:cNvPr id="7" name="Image 6">
-            <a:extLst>
-              <a:ext uri="{FF2B5EF4-FFF2-40B4-BE49-F238E27FC236}">
-                <a16:creationId xmlns:a16="http://schemas.microsoft.com/office/drawing/2014/main" id="{D3D439B4-1231-AFD2-9D9C-95B1C5D18B0B}"/>
-              </a:ext>
-            </a:extLst>
-          </p:cNvPr>
-          <p:cNvPicPr>
-            <a:picLocks noChangeAspect="1"/>
-          </p:cNvPicPr>
-          <p:nvPr/>
-        </p:nvPicPr>
-        <p:blipFill>
-          <a:blip r:embed="rId3"/>
-          <a:stretch>
-            <a:fillRect/>
-          </a:stretch>
-        </p:blipFill>
-        <p:spPr>
-          <a:xfrm>
-            <a:off x="3906135" y="5719809"/>
-            <a:ext cx="5039428" cy="733527"/>
-          </a:xfrm>
-          <a:prstGeom prst="rect">
-            <a:avLst/>
-          </a:prstGeom>
-        </p:spPr>
-      </p:pic>
-    </p:spTree>
-    <p:extLst>
-      <p:ext uri="{BB962C8B-B14F-4D97-AF65-F5344CB8AC3E}">
-        <p14:creationId xmlns:p14="http://schemas.microsoft.com/office/powerpoint/2010/main" val="2934119756"/>
-      </p:ext>
-    </p:extLst>
-  </p:cSld>
-  <p:clrMapOvr>
-    <a:masterClrMapping/>
-  </p:clrMapOvr>
-</p:sld>
-</file>
-
-<file path=ppt/slides/slide21.xml><?xml version="1.0" encoding="utf-8"?>
-<p:sld xmlns:a="http://schemas.openxmlformats.org/drawingml/2006/main" xmlns:r="http://schemas.openxmlformats.org/officeDocument/2006/relationships" xmlns:p="http://schemas.openxmlformats.org/presentationml/2006/main">
-  <p:cSld>
-    <p:spTree>
-      <p:nvGrpSpPr>
-        <p:cNvPr id="1" name=""/>
-        <p:cNvGrpSpPr/>
-        <p:nvPr/>
-      </p:nvGrpSpPr>
-      <p:grpSpPr>
-        <a:xfrm>
-          <a:off x="0" y="0"/>
-          <a:ext cx="0" cy="0"/>
-          <a:chOff x="0" y="0"/>
-          <a:chExt cx="0" cy="0"/>
-        </a:xfrm>
-      </p:grpSpPr>
-      <p:sp>
-        <p:nvSpPr>
-          <p:cNvPr id="2" name="Titre 1">
-            <a:extLst>
-              <a:ext uri="{FF2B5EF4-FFF2-40B4-BE49-F238E27FC236}">
-                <a16:creationId xmlns:a16="http://schemas.microsoft.com/office/drawing/2014/main" id="{A106D613-B2B8-4F87-7091-230E28DAD0C4}"/>
-              </a:ext>
-            </a:extLst>
-          </p:cNvPr>
-          <p:cNvSpPr>
-            <a:spLocks noGrp="1"/>
-          </p:cNvSpPr>
-          <p:nvPr>
-            <p:ph type="title"/>
-          </p:nvPr>
-        </p:nvSpPr>
-        <p:spPr/>
-        <p:txBody>
-          <a:bodyPr/>
-          <a:lstStyle/>
-          <a:p>
-            <a:r>
-              <a:rPr lang="fr-FR" dirty="0"/>
-              <a:t>Retour d’</a:t>
-            </a:r>
-            <a:r>
-              <a:rPr lang="fr-FR" dirty="0" err="1"/>
-              <a:t>errejur</a:t>
-            </a:r>
-            <a:endParaRPr lang="fr-FR" dirty="0"/>
-          </a:p>
-        </p:txBody>
-      </p:sp>
-      <p:sp>
-        <p:nvSpPr>
-          <p:cNvPr id="3" name="Espace réservé du contenu 2">
-            <a:extLst>
-              <a:ext uri="{FF2B5EF4-FFF2-40B4-BE49-F238E27FC236}">
-                <a16:creationId xmlns:a16="http://schemas.microsoft.com/office/drawing/2014/main" id="{3ECD1029-2688-6779-ABE5-4CCA286889D1}"/>
-              </a:ext>
-            </a:extLst>
-          </p:cNvPr>
-          <p:cNvSpPr>
-            <a:spLocks noGrp="1"/>
-          </p:cNvSpPr>
-          <p:nvPr>
-            <p:ph idx="1"/>
-          </p:nvPr>
-        </p:nvSpPr>
-        <p:spPr/>
-        <p:txBody>
-          <a:bodyPr/>
-          <a:lstStyle/>
-          <a:p>
-            <a:r>
-              <a:rPr lang="fr-FR" dirty="0" err="1"/>
-              <a:t>HTTPException</a:t>
-            </a:r>
-            <a:endParaRPr lang="fr-FR" dirty="0"/>
-          </a:p>
-        </p:txBody>
-      </p:sp>
-      <p:pic>
-        <p:nvPicPr>
-          <p:cNvPr id="5" name="Image 4">
-            <a:extLst>
-              <a:ext uri="{FF2B5EF4-FFF2-40B4-BE49-F238E27FC236}">
-                <a16:creationId xmlns:a16="http://schemas.microsoft.com/office/drawing/2014/main" id="{8B0B798C-2D3E-9488-DD72-FB620C1AF0D7}"/>
-              </a:ext>
-            </a:extLst>
-          </p:cNvPr>
-          <p:cNvPicPr>
-            <a:picLocks noChangeAspect="1"/>
-          </p:cNvPicPr>
-          <p:nvPr/>
-        </p:nvPicPr>
-        <p:blipFill>
-          <a:blip r:embed="rId2"/>
-          <a:stretch>
-            <a:fillRect/>
-          </a:stretch>
-        </p:blipFill>
-        <p:spPr>
-          <a:xfrm>
-            <a:off x="1071074" y="2776446"/>
-            <a:ext cx="7001852" cy="1305107"/>
-          </a:xfrm>
-          <a:prstGeom prst="rect">
-            <a:avLst/>
-          </a:prstGeom>
-        </p:spPr>
-      </p:pic>
-    </p:spTree>
-    <p:extLst>
-      <p:ext uri="{BB962C8B-B14F-4D97-AF65-F5344CB8AC3E}">
-        <p14:creationId xmlns:p14="http://schemas.microsoft.com/office/powerpoint/2010/main" val="1728727818"/>
-      </p:ext>
-    </p:extLst>
-  </p:cSld>
-  <p:clrMapOvr>
-    <a:masterClrMapping/>
-  </p:clrMapOvr>
-</p:sld>
-</file>
-
-<file path=ppt/slides/slide22.xml><?xml version="1.0" encoding="utf-8"?>
-<p:sld xmlns:a="http://schemas.openxmlformats.org/drawingml/2006/main" xmlns:r="http://schemas.openxmlformats.org/officeDocument/2006/relationships" xmlns:p="http://schemas.openxmlformats.org/presentationml/2006/main">
-  <p:cSld>
-    <p:spTree>
-      <p:nvGrpSpPr>
-        <p:cNvPr id="1" name=""/>
-        <p:cNvGrpSpPr/>
-        <p:nvPr/>
-      </p:nvGrpSpPr>
-      <p:grpSpPr>
-        <a:xfrm>
-          <a:off x="0" y="0"/>
-          <a:ext cx="0" cy="0"/>
-          <a:chOff x="0" y="0"/>
-          <a:chExt cx="0" cy="0"/>
-        </a:xfrm>
-      </p:grpSpPr>
-      <p:sp>
-        <p:nvSpPr>
-          <p:cNvPr id="2" name="Titre 1">
-            <a:extLst>
-              <a:ext uri="{FF2B5EF4-FFF2-40B4-BE49-F238E27FC236}">
-                <a16:creationId xmlns:a16="http://schemas.microsoft.com/office/drawing/2014/main" id="{8E9321EA-094D-D260-7320-20360E6D0793}"/>
-              </a:ext>
-            </a:extLst>
-          </p:cNvPr>
-          <p:cNvSpPr>
-            <a:spLocks noGrp="1"/>
-          </p:cNvSpPr>
-          <p:nvPr>
-            <p:ph type="title"/>
-          </p:nvPr>
-        </p:nvSpPr>
-        <p:spPr/>
-        <p:txBody>
-          <a:bodyPr/>
-          <a:lstStyle/>
-          <a:p>
-            <a:r>
-              <a:rPr lang="fr-FR" dirty="0"/>
-              <a:t>Adapter</a:t>
-            </a:r>
-          </a:p>
-        </p:txBody>
-      </p:sp>
-      <p:sp>
-        <p:nvSpPr>
-          <p:cNvPr id="3" name="Espace réservé du contenu 2">
-            <a:extLst>
-              <a:ext uri="{FF2B5EF4-FFF2-40B4-BE49-F238E27FC236}">
-                <a16:creationId xmlns:a16="http://schemas.microsoft.com/office/drawing/2014/main" id="{573F9DBC-51F5-4115-E749-14CFA03DB4C7}"/>
-              </a:ext>
-            </a:extLst>
-          </p:cNvPr>
-          <p:cNvSpPr>
-            <a:spLocks noGrp="1"/>
-          </p:cNvSpPr>
-          <p:nvPr>
-            <p:ph idx="1"/>
-          </p:nvPr>
-        </p:nvSpPr>
-        <p:spPr/>
-        <p:txBody>
-          <a:bodyPr/>
-          <a:lstStyle/>
-          <a:p>
-            <a:r>
-              <a:rPr lang="fr-FR" dirty="0"/>
-              <a:t>Conversion d’une entité en DTO</a:t>
-            </a:r>
-          </a:p>
-          <a:p>
-            <a:pPr lvl="1"/>
-            <a:r>
-              <a:rPr lang="fr-FR" dirty="0"/>
-              <a:t>Et inversement</a:t>
-            </a:r>
-          </a:p>
-        </p:txBody>
-      </p:sp>
-    </p:spTree>
-    <p:extLst>
-      <p:ext uri="{BB962C8B-B14F-4D97-AF65-F5344CB8AC3E}">
-        <p14:creationId xmlns:p14="http://schemas.microsoft.com/office/powerpoint/2010/main" val="2015496789"/>
       </p:ext>
     </p:extLst>
   </p:cSld>
